--- a/s5a/descargables/S5A_ALU_04_Presentacion.pptx
+++ b/s5a/descargables/S5A_ALU_04_Presentacion.pptx
@@ -10832,48 +10832,6 @@
           </a:p>
         </p:txBody>
       </p:sp>
-      <p:sp>
-        <p:nvSpPr>
-          <p:cNvPr id="9" name="Text 7"/>
-          <p:cNvSpPr txBox="1"/>
-          <p:nvPr/>
-        </p:nvSpPr>
-        <p:spPr>
-          <a:xfrm>
-            <a:off x="502920" y="1926336"/>
-            <a:ext cx="8138160" cy="217551"/>
-          </a:xfrm>
-          <a:prstGeom prst="rect">
-            <a:avLst/>
-          </a:prstGeom>
-          <a:noFill/>
-          <a:ln/>
-        </p:spPr>
-        <p:txBody>
-          <a:bodyPr wrap="square" lIns="0" tIns="0" rIns="0" bIns="0" rtlCol="0" anchor="ctr"/>
-          <a:lstStyle/>
-          <a:p>
-            <a:pPr indent="0" marL="0">
-              <a:lnSpc>
-                <a:spcPct val="120000"/>
-              </a:lnSpc>
-              <a:buNone/>
-            </a:pPr>
-            <a:r>
-              <a:rPr lang="en-US" sz="1050" dirty="0">
-                <a:solidFill>
-                  <a:srgbClr val="393E41"/>
-                </a:solidFill>
-                <a:latin typeface="Arial" pitchFamily="34" charset="0"/>
-                <a:ea typeface="Arial" pitchFamily="34" charset="-122"/>
-                <a:cs typeface="Arial" pitchFamily="34" charset="-120"/>
-              </a:rPr>
-              <a:t>El proyecto del 14 de septiembre y lo publicado el 24 salieron idénticos, hasta en los errores.</a:t>
-            </a:r>
-            <a:endParaRPr lang="en-US" sz="1050" dirty="0"/>
-          </a:p>
-        </p:txBody>
-      </p:sp>
       <p:graphicFrame>
         <p:nvGraphicFramePr>
           <p:cNvPr id="20" name="Table 0"/>
@@ -10889,7 +10847,7 @@
           </p:nvPr>
         </p:nvGraphicFramePr>
         <p:xfrm>
-          <a:off x="502920" y="2326767"/>
+          <a:off x="502920" y="1926336"/>
           <a:ext cx="8138160" cy="914400"/>
         </p:xfrm>
         <a:graphic>
@@ -10898,11 +10856,11 @@
               <a:tblPr/>
               <a:tblGrid>
                 <a:gridCol w="868680"/>
-                <a:gridCol w="2240280"/>
                 <a:gridCol w="2148840"/>
-                <a:gridCol w="2880360"/>
+                <a:gridCol w="2057400"/>
+                <a:gridCol w="3063240"/>
               </a:tblGrid>
-              <a:tr h="256032">
+              <a:tr h="219456">
                 <a:tc>
                   <a:txBody>
                     <a:bodyPr/>
@@ -10912,7 +10870,7 @@
                         <a:buNone/>
                       </a:pPr>
                       <a:r>
-                        <a:rPr lang="en-US" sz="950" b="1" dirty="0">
+                        <a:rPr lang="en-US" sz="900" b="1" dirty="0">
                           <a:solidFill>
                             <a:srgbClr val="FFFFFF"/>
                           </a:solidFill>
@@ -10922,7 +10880,7 @@
                         </a:rPr>
                         <a:t>Anexo</a:t>
                       </a:r>
-                      <a:endParaRPr lang="en-US" sz="950" dirty="0">
+                      <a:endParaRPr lang="en-US" sz="900" dirty="0">
                         <a:latin typeface="Arial" charset="0"/>
                         <a:ea typeface="Arial" charset="0"/>
                         <a:cs typeface="Arial" charset="0"/>
@@ -10980,7 +10938,7 @@
                         <a:buNone/>
                       </a:pPr>
                       <a:r>
-                        <a:rPr lang="en-US" sz="950" b="1" dirty="0">
+                        <a:rPr lang="en-US" sz="900" b="1" dirty="0">
                           <a:solidFill>
                             <a:srgbClr val="FFFFFF"/>
                           </a:solidFill>
@@ -10990,7 +10948,7 @@
                         </a:rPr>
                         <a:t>Dice</a:t>
                       </a:r>
-                      <a:endParaRPr lang="en-US" sz="950" dirty="0">
+                      <a:endParaRPr lang="en-US" sz="900" dirty="0">
                         <a:latin typeface="Arial" charset="0"/>
                         <a:ea typeface="Arial" charset="0"/>
                         <a:cs typeface="Arial" charset="0"/>
@@ -11048,7 +11006,7 @@
                         <a:buNone/>
                       </a:pPr>
                       <a:r>
-                        <a:rPr lang="en-US" sz="950" b="1" dirty="0">
+                        <a:rPr lang="en-US" sz="900" b="1" dirty="0">
                           <a:solidFill>
                             <a:srgbClr val="FFFFFF"/>
                           </a:solidFill>
@@ -11058,7 +11016,7 @@
                         </a:rPr>
                         <a:t>Debería decir</a:t>
                       </a:r>
-                      <a:endParaRPr lang="en-US" sz="950" dirty="0">
+                      <a:endParaRPr lang="en-US" sz="900" dirty="0">
                         <a:latin typeface="Arial" charset="0"/>
                         <a:ea typeface="Arial" charset="0"/>
                         <a:cs typeface="Arial" charset="0"/>
@@ -11116,7 +11074,7 @@
                         <a:buNone/>
                       </a:pPr>
                       <a:r>
-                        <a:rPr lang="en-US" sz="950" b="1" dirty="0">
+                        <a:rPr lang="en-US" sz="900" b="1" dirty="0">
                           <a:solidFill>
                             <a:srgbClr val="FFFFFF"/>
                           </a:solidFill>
@@ -11126,7 +11084,7 @@
                         </a:rPr>
                         <a:t>Riesgo</a:t>
                       </a:r>
-                      <a:endParaRPr lang="en-US" sz="950" dirty="0">
+                      <a:endParaRPr lang="en-US" sz="900" dirty="0">
                         <a:latin typeface="Arial" charset="0"/>
                         <a:ea typeface="Arial" charset="0"/>
                         <a:cs typeface="Arial" charset="0"/>
@@ -11176,7 +11134,7 @@
                   </a:tcPr>
                 </a:tc>
               </a:tr>
-              <a:tr h="256032">
+              <a:tr h="219456">
                 <a:tc>
                   <a:txBody>
                     <a:bodyPr/>
@@ -11186,7 +11144,7 @@
                         <a:buNone/>
                       </a:pPr>
                       <a:r>
-                        <a:rPr lang="en-US" sz="850" dirty="0">
+                        <a:rPr lang="en-US" sz="800" dirty="0">
                           <a:solidFill>
                             <a:srgbClr val="1B1B1E"/>
                           </a:solidFill>
@@ -11196,7 +11154,7 @@
                         </a:rPr>
                         <a:t>2-B</a:t>
                       </a:r>
-                      <a:endParaRPr lang="en-US" sz="850" dirty="0">
+                      <a:endParaRPr lang="en-US" sz="800" dirty="0">
                         <a:latin typeface="Arial" charset="0"/>
                         <a:ea typeface="Arial" charset="0"/>
                         <a:cs typeface="Arial" charset="0"/>
@@ -11254,7 +11212,7 @@
                         <a:buNone/>
                       </a:pPr>
                       <a:r>
-                        <a:rPr lang="en-US" sz="850" dirty="0">
+                        <a:rPr lang="en-US" sz="800" dirty="0">
                           <a:solidFill>
                             <a:srgbClr val="1B1B1E"/>
                           </a:solidFill>
@@ -11264,7 +11222,7 @@
                         </a:rPr>
                         <a:t>&lt;total_fg_juridicas&gt;</a:t>
                       </a:r>
-                      <a:endParaRPr lang="en-US" sz="850" dirty="0">
+                      <a:endParaRPr lang="en-US" sz="800" dirty="0">
                         <a:latin typeface="Courier New" charset="0"/>
                         <a:ea typeface="Courier New" charset="0"/>
                         <a:cs typeface="Courier New" charset="0"/>
@@ -11322,7 +11280,7 @@
                         <a:buNone/>
                       </a:pPr>
                       <a:r>
-                        <a:rPr lang="en-US" sz="850" dirty="0">
+                        <a:rPr lang="en-US" sz="800" dirty="0">
                           <a:solidFill>
                             <a:srgbClr val="1B1B1E"/>
                           </a:solidFill>
@@ -11332,7 +11290,7 @@
                         </a:rPr>
                         <a:t>&lt;total_fig_juridicas&gt;</a:t>
                       </a:r>
-                      <a:endParaRPr lang="en-US" sz="850" dirty="0">
+                      <a:endParaRPr lang="en-US" sz="800" dirty="0">
                         <a:latin typeface="Courier New" charset="0"/>
                         <a:ea typeface="Courier New" charset="0"/>
                         <a:cs typeface="Courier New" charset="0"/>
@@ -11390,7 +11348,7 @@
                         <a:buNone/>
                       </a:pPr>
                       <a:r>
-                        <a:rPr lang="en-US" sz="850" dirty="0">
+                        <a:rPr lang="en-US" sz="800" dirty="0">
                           <a:solidFill>
                             <a:srgbClr val="1B1B1E"/>
                           </a:solidFill>
@@ -11398,9 +11356,9 @@
                           <a:ea typeface="Arial" pitchFamily="34" charset="-122"/>
                           <a:cs typeface="Arial" pitchFamily="34" charset="-120"/>
                         </a:rPr>
-                        <a:t>Falta la i. Los otros 19 la traen bien</a:t>
+                        <a:t>Falta la i. Los otros 19 la traen</a:t>
                       </a:r>
-                      <a:endParaRPr lang="en-US" sz="850" dirty="0">
+                      <a:endParaRPr lang="en-US" sz="800" dirty="0">
                         <a:latin typeface="Arial" charset="0"/>
                         <a:ea typeface="Arial" charset="0"/>
                         <a:cs typeface="Arial" charset="0"/>
@@ -11450,7 +11408,7 @@
                   </a:tcPr>
                 </a:tc>
               </a:tr>
-              <a:tr h="256032">
+              <a:tr h="219456">
                 <a:tc>
                   <a:txBody>
                     <a:bodyPr/>
@@ -11460,7 +11418,7 @@
                         <a:buNone/>
                       </a:pPr>
                       <a:r>
-                        <a:rPr lang="en-US" sz="850" dirty="0">
+                        <a:rPr lang="en-US" sz="800" dirty="0">
                           <a:solidFill>
                             <a:srgbClr val="1B1B1E"/>
                           </a:solidFill>
@@ -11470,7 +11428,7 @@
                         </a:rPr>
                         <a:t>9</a:t>
                       </a:r>
-                      <a:endParaRPr lang="en-US" sz="850" dirty="0">
+                      <a:endParaRPr lang="en-US" sz="800" dirty="0">
                         <a:latin typeface="Arial" charset="0"/>
                         <a:ea typeface="Arial" charset="0"/>
                         <a:cs typeface="Arial" charset="0"/>
@@ -11528,7 +11486,7 @@
                         <a:buNone/>
                       </a:pPr>
                       <a:r>
-                        <a:rPr lang="en-US" sz="850" dirty="0">
+                        <a:rPr lang="en-US" sz="800" dirty="0">
                           <a:solidFill>
                             <a:srgbClr val="1B1B1E"/>
                           </a:solidFill>
@@ -11538,7 +11496,7 @@
                         </a:rPr>
                         <a:t>&lt;tipo_pesona_moral&gt;</a:t>
                       </a:r>
-                      <a:endParaRPr lang="en-US" sz="850" dirty="0">
+                      <a:endParaRPr lang="en-US" sz="800" dirty="0">
                         <a:latin typeface="Courier New" charset="0"/>
                         <a:ea typeface="Courier New" charset="0"/>
                         <a:cs typeface="Courier New" charset="0"/>
@@ -11596,7 +11554,7 @@
                         <a:buNone/>
                       </a:pPr>
                       <a:r>
-                        <a:rPr lang="en-US" sz="850" dirty="0">
+                        <a:rPr lang="en-US" sz="800" dirty="0">
                           <a:solidFill>
                             <a:srgbClr val="1B1B1E"/>
                           </a:solidFill>
@@ -11606,7 +11564,7 @@
                         </a:rPr>
                         <a:t>&lt;tipo_persona_moral&gt;</a:t>
                       </a:r>
-                      <a:endParaRPr lang="en-US" sz="850" dirty="0">
+                      <a:endParaRPr lang="en-US" sz="800" dirty="0">
                         <a:latin typeface="Courier New" charset="0"/>
                         <a:ea typeface="Courier New" charset="0"/>
                         <a:cs typeface="Courier New" charset="0"/>
@@ -11664,7 +11622,7 @@
                         <a:buNone/>
                       </a:pPr>
                       <a:r>
-                        <a:rPr lang="en-US" sz="850" dirty="0">
+                        <a:rPr lang="en-US" sz="800" dirty="0">
                           <a:solidFill>
                             <a:srgbClr val="1B1B1E"/>
                           </a:solidFill>
@@ -11674,7 +11632,7 @@
                         </a:rPr>
                         <a:t>Falta la r. Mismo riesgo</a:t>
                       </a:r>
-                      <a:endParaRPr lang="en-US" sz="850" dirty="0">
+                      <a:endParaRPr lang="en-US" sz="800" dirty="0">
                         <a:latin typeface="Arial" charset="0"/>
                         <a:ea typeface="Arial" charset="0"/>
                         <a:cs typeface="Arial" charset="0"/>
@@ -11724,7 +11682,7 @@
                   </a:tcPr>
                 </a:tc>
               </a:tr>
-              <a:tr h="256032">
+              <a:tr h="219456">
                 <a:tc>
                   <a:txBody>
                     <a:bodyPr/>
@@ -11734,7 +11692,7 @@
                         <a:buNone/>
                       </a:pPr>
                       <a:r>
-                        <a:rPr lang="en-US" sz="850" dirty="0">
+                        <a:rPr lang="en-US" sz="800" dirty="0">
                           <a:solidFill>
                             <a:srgbClr val="1B1B1E"/>
                           </a:solidFill>
@@ -11742,9 +11700,9 @@
                           <a:ea typeface="Arial" pitchFamily="34" charset="-122"/>
                           <a:cs typeface="Arial" pitchFamily="34" charset="-120"/>
                         </a:rPr>
-                        <a:t>2-B y 10</a:t>
+                        <a:t>10</a:t>
                       </a:r>
-                      <a:endParaRPr lang="en-US" sz="850" dirty="0">
+                      <a:endParaRPr lang="en-US" sz="800" dirty="0">
                         <a:latin typeface="Arial" charset="0"/>
                         <a:ea typeface="Arial" charset="0"/>
                         <a:cs typeface="Arial" charset="0"/>
@@ -11802,7 +11760,7 @@
                         <a:buNone/>
                       </a:pPr>
                       <a:r>
-                        <a:rPr lang="en-US" sz="850" dirty="0">
+                        <a:rPr lang="en-US" sz="800" dirty="0">
                           <a:solidFill>
                             <a:srgbClr val="1B1B1E"/>
                           </a:solidFill>
@@ -11810,9 +11768,9 @@
                           <a:ea typeface="Courier New" pitchFamily="34" charset="-122"/>
                           <a:cs typeface="Courier New" pitchFamily="34" charset="-120"/>
                         </a:rPr>
-                        <a:t>&lt; bc _persona_fisica&gt;</a:t>
+                        <a:t>&lt;persona _fisica&gt;</a:t>
                       </a:r>
-                      <a:endParaRPr lang="en-US" sz="850" dirty="0">
+                      <a:endParaRPr lang="en-US" sz="800" dirty="0">
                         <a:latin typeface="Courier New" charset="0"/>
                         <a:ea typeface="Courier New" charset="0"/>
                         <a:cs typeface="Courier New" charset="0"/>
@@ -11870,7 +11828,7 @@
                         <a:buNone/>
                       </a:pPr>
                       <a:r>
-                        <a:rPr lang="en-US" sz="850" dirty="0">
+                        <a:rPr lang="en-US" sz="800" dirty="0">
                           <a:solidFill>
                             <a:srgbClr val="1B1B1E"/>
                           </a:solidFill>
@@ -11878,9 +11836,9 @@
                           <a:ea typeface="Courier New" pitchFamily="34" charset="-122"/>
                           <a:cs typeface="Courier New" pitchFamily="34" charset="-120"/>
                         </a:rPr>
-                        <a:t>&lt;bc_persona_fisica&gt;</a:t>
+                        <a:t>&lt;persona_fisica&gt;</a:t>
                       </a:r>
-                      <a:endParaRPr lang="en-US" sz="850" dirty="0">
+                      <a:endParaRPr lang="en-US" sz="800" dirty="0">
                         <a:latin typeface="Courier New" charset="0"/>
                         <a:ea typeface="Courier New" charset="0"/>
                         <a:cs typeface="Courier New" charset="0"/>
@@ -11938,7 +11896,7 @@
                         <a:buNone/>
                       </a:pPr>
                       <a:r>
-                        <a:rPr lang="en-US" sz="850" dirty="0">
+                        <a:rPr lang="en-US" sz="800" dirty="0">
                           <a:solidFill>
                             <a:srgbClr val="1B1B1E"/>
                           </a:solidFill>
@@ -11946,9 +11904,9 @@
                           <a:ea typeface="Arial" pitchFamily="34" charset="-122"/>
                           <a:cs typeface="Arial" pitchFamily="34" charset="-120"/>
                         </a:rPr>
-                        <a:t>Espacios dentro de la etiqueta</a:t>
+                        <a:t>Espacio en la etiqueta. Igual en &lt;persona _moral&gt;</a:t>
                       </a:r>
-                      <a:endParaRPr lang="en-US" sz="850" dirty="0">
+                      <a:endParaRPr lang="en-US" sz="800" dirty="0">
                         <a:latin typeface="Arial" charset="0"/>
                         <a:ea typeface="Arial" charset="0"/>
                         <a:cs typeface="Arial" charset="0"/>
@@ -11998,7 +11956,7 @@
                   </a:tcPr>
                 </a:tc>
               </a:tr>
-              <a:tr h="256032">
+              <a:tr h="219456">
                 <a:tc>
                   <a:txBody>
                     <a:bodyPr/>
@@ -12008,7 +11966,7 @@
                         <a:buNone/>
                       </a:pPr>
                       <a:r>
-                        <a:rPr lang="en-US" sz="850" dirty="0">
+                        <a:rPr lang="en-US" sz="800" dirty="0">
                           <a:solidFill>
                             <a:srgbClr val="1B1B1E"/>
                           </a:solidFill>
@@ -12016,9 +11974,9 @@
                           <a:ea typeface="Arial" pitchFamily="34" charset="-122"/>
                           <a:cs typeface="Arial" pitchFamily="34" charset="-120"/>
                         </a:rPr>
-                        <a:t>16</a:t>
+                        <a:t>12-C</a:t>
                       </a:r>
-                      <a:endParaRPr lang="en-US" sz="850" dirty="0">
+                      <a:endParaRPr lang="en-US" sz="800" dirty="0">
                         <a:latin typeface="Arial" charset="0"/>
                         <a:ea typeface="Arial" charset="0"/>
                         <a:cs typeface="Arial" charset="0"/>
@@ -12076,20 +12034,20 @@
                         <a:buNone/>
                       </a:pPr>
                       <a:r>
-                        <a:rPr lang="en-US" sz="850" dirty="0">
+                        <a:rPr lang="en-US" sz="800" dirty="0">
                           <a:solidFill>
                             <a:srgbClr val="1B1B1E"/>
                           </a:solidFill>
-                          <a:latin typeface="Arial" pitchFamily="34" charset="0"/>
-                          <a:ea typeface="Arial" pitchFamily="34" charset="-122"/>
-                          <a:cs typeface="Arial" pitchFamily="34" charset="-120"/>
+                          <a:latin typeface="Courier New" pitchFamily="34" charset="0"/>
+                          <a:ea typeface="Courier New" pitchFamily="34" charset="-122"/>
+                          <a:cs typeface="Courier New" pitchFamily="34" charset="-120"/>
                         </a:rPr>
-                        <a:t>Salta del 3.5.3.3.1.4.5 al 3.5.3.3.1.6</a:t>
+                        <a:t>&lt;valor_avalúo_catastral&gt;</a:t>
                       </a:r>
-                      <a:endParaRPr lang="en-US" sz="850" dirty="0">
-                        <a:latin typeface="Arial" charset="0"/>
-                        <a:ea typeface="Arial" charset="0"/>
-                        <a:cs typeface="Arial" charset="0"/>
+                      <a:endParaRPr lang="en-US" sz="800" dirty="0">
+                        <a:latin typeface="Courier New" charset="0"/>
+                        <a:ea typeface="Courier New" charset="0"/>
+                        <a:cs typeface="Courier New" charset="0"/>
                       </a:endParaRPr>
                     </a:p>
                   </a:txBody>
@@ -12144,20 +12102,20 @@
                         <a:buNone/>
                       </a:pPr>
                       <a:r>
-                        <a:rPr lang="en-US" sz="850" dirty="0">
+                        <a:rPr lang="en-US" sz="800" dirty="0">
                           <a:solidFill>
                             <a:srgbClr val="1B1B1E"/>
                           </a:solidFill>
-                          <a:latin typeface="Arial" pitchFamily="34" charset="0"/>
-                          <a:ea typeface="Arial" pitchFamily="34" charset="-122"/>
-                          <a:cs typeface="Arial" pitchFamily="34" charset="-120"/>
+                          <a:latin typeface="Courier New" pitchFamily="34" charset="0"/>
+                          <a:ea typeface="Courier New" pitchFamily="34" charset="-122"/>
+                          <a:cs typeface="Courier New" pitchFamily="34" charset="-120"/>
                         </a:rPr>
-                        <a:t>—</a:t>
+                        <a:t>&lt;valor_avaluo_catastral&gt;</a:t>
                       </a:r>
-                      <a:endParaRPr lang="en-US" sz="850" dirty="0">
-                        <a:latin typeface="Arial" charset="0"/>
-                        <a:ea typeface="Arial" charset="0"/>
-                        <a:cs typeface="Arial" charset="0"/>
+                      <a:endParaRPr lang="en-US" sz="800" dirty="0">
+                        <a:latin typeface="Courier New" charset="0"/>
+                        <a:ea typeface="Courier New" charset="0"/>
+                        <a:cs typeface="Courier New" charset="0"/>
                       </a:endParaRPr>
                     </a:p>
                   </a:txBody>
@@ -12212,7 +12170,281 @@
                         <a:buNone/>
                       </a:pPr>
                       <a:r>
-                        <a:rPr lang="en-US" sz="850" dirty="0">
+                        <a:rPr lang="en-US" sz="800" dirty="0">
+                          <a:solidFill>
+                            <a:srgbClr val="1B1B1E"/>
+                          </a:solidFill>
+                          <a:latin typeface="Arial" pitchFamily="34" charset="0"/>
+                          <a:ea typeface="Arial" pitchFamily="34" charset="-122"/>
+                          <a:cs typeface="Arial" pitchFamily="34" charset="-120"/>
+                        </a:rPr>
+                        <a:t>Acento en la etiqueta. En el 5-A va sin él</a:t>
+                      </a:r>
+                      <a:endParaRPr lang="en-US" sz="800" dirty="0">
+                        <a:latin typeface="Arial" charset="0"/>
+                        <a:ea typeface="Arial" charset="0"/>
+                        <a:cs typeface="Arial" charset="0"/>
+                      </a:endParaRPr>
+                    </a:p>
+                  </a:txBody>
+                  <a:tcPr marL="63500" marR="63500" marT="63500" marB="63500" anchor="ctr">
+                    <a:lnL w="6350" cap="flat" cmpd="sng" algn="ctr">
+                      <a:solidFill>
+                        <a:srgbClr val="747975"/>
+                      </a:solidFill>
+                      <a:prstDash val="solid"/>
+                      <a:round/>
+                      <a:headEnd type="none" w="med" len="med"/>
+                      <a:tailEnd type="none" w="med" len="med"/>
+                    </a:lnL>
+                    <a:lnR w="6350" cap="flat" cmpd="sng" algn="ctr">
+                      <a:solidFill>
+                        <a:srgbClr val="747975"/>
+                      </a:solidFill>
+                      <a:prstDash val="solid"/>
+                      <a:round/>
+                      <a:headEnd type="none" w="med" len="med"/>
+                      <a:tailEnd type="none" w="med" len="med"/>
+                    </a:lnR>
+                    <a:lnT w="6350" cap="flat" cmpd="sng" algn="ctr">
+                      <a:solidFill>
+                        <a:srgbClr val="747975"/>
+                      </a:solidFill>
+                      <a:prstDash val="solid"/>
+                      <a:round/>
+                      <a:headEnd type="none" w="med" len="med"/>
+                      <a:tailEnd type="none" w="med" len="med"/>
+                    </a:lnT>
+                    <a:lnB w="6350" cap="flat" cmpd="sng" algn="ctr">
+                      <a:solidFill>
+                        <a:srgbClr val="747975"/>
+                      </a:solidFill>
+                      <a:prstDash val="solid"/>
+                      <a:round/>
+                      <a:headEnd type="none" w="med" len="med"/>
+                      <a:tailEnd type="none" w="med" len="med"/>
+                    </a:lnB>
+                    <a:solidFill>
+                      <a:srgbClr val="FFFFFF"/>
+                    </a:solidFill>
+                  </a:tcPr>
+                </a:tc>
+              </a:tr>
+              <a:tr h="219456">
+                <a:tc>
+                  <a:txBody>
+                    <a:bodyPr/>
+                    <a:lstStyle/>
+                    <a:p>
+                      <a:pPr indent="0" marL="0">
+                        <a:buNone/>
+                      </a:pPr>
+                      <a:r>
+                        <a:rPr lang="en-US" sz="800" dirty="0">
+                          <a:solidFill>
+                            <a:srgbClr val="1B1B1E"/>
+                          </a:solidFill>
+                          <a:latin typeface="Arial" pitchFamily="34" charset="0"/>
+                          <a:ea typeface="Arial" pitchFamily="34" charset="-122"/>
+                          <a:cs typeface="Arial" pitchFamily="34" charset="-120"/>
+                        </a:rPr>
+                        <a:t>16</a:t>
+                      </a:r>
+                      <a:endParaRPr lang="en-US" sz="800" dirty="0">
+                        <a:latin typeface="Arial" charset="0"/>
+                        <a:ea typeface="Arial" charset="0"/>
+                        <a:cs typeface="Arial" charset="0"/>
+                      </a:endParaRPr>
+                    </a:p>
+                  </a:txBody>
+                  <a:tcPr marL="63500" marR="63500" marT="63500" marB="63500" anchor="ctr">
+                    <a:lnL w="6350" cap="flat" cmpd="sng" algn="ctr">
+                      <a:solidFill>
+                        <a:srgbClr val="747975"/>
+                      </a:solidFill>
+                      <a:prstDash val="solid"/>
+                      <a:round/>
+                      <a:headEnd type="none" w="med" len="med"/>
+                      <a:tailEnd type="none" w="med" len="med"/>
+                    </a:lnL>
+                    <a:lnR w="6350" cap="flat" cmpd="sng" algn="ctr">
+                      <a:solidFill>
+                        <a:srgbClr val="747975"/>
+                      </a:solidFill>
+                      <a:prstDash val="solid"/>
+                      <a:round/>
+                      <a:headEnd type="none" w="med" len="med"/>
+                      <a:tailEnd type="none" w="med" len="med"/>
+                    </a:lnR>
+                    <a:lnT w="6350" cap="flat" cmpd="sng" algn="ctr">
+                      <a:solidFill>
+                        <a:srgbClr val="747975"/>
+                      </a:solidFill>
+                      <a:prstDash val="solid"/>
+                      <a:round/>
+                      <a:headEnd type="none" w="med" len="med"/>
+                      <a:tailEnd type="none" w="med" len="med"/>
+                    </a:lnT>
+                    <a:lnB w="6350" cap="flat" cmpd="sng" algn="ctr">
+                      <a:solidFill>
+                        <a:srgbClr val="747975"/>
+                      </a:solidFill>
+                      <a:prstDash val="solid"/>
+                      <a:round/>
+                      <a:headEnd type="none" w="med" len="med"/>
+                      <a:tailEnd type="none" w="med" len="med"/>
+                    </a:lnB>
+                    <a:solidFill>
+                      <a:srgbClr val="FFFFFF"/>
+                    </a:solidFill>
+                  </a:tcPr>
+                </a:tc>
+                <a:tc>
+                  <a:txBody>
+                    <a:bodyPr/>
+                    <a:lstStyle/>
+                    <a:p>
+                      <a:pPr indent="0" marL="0">
+                        <a:buNone/>
+                      </a:pPr>
+                      <a:r>
+                        <a:rPr lang="en-US" sz="800" dirty="0">
+                          <a:solidFill>
+                            <a:srgbClr val="1B1B1E"/>
+                          </a:solidFill>
+                          <a:latin typeface="Arial" pitchFamily="34" charset="0"/>
+                          <a:ea typeface="Arial" pitchFamily="34" charset="-122"/>
+                          <a:cs typeface="Arial" pitchFamily="34" charset="-120"/>
+                        </a:rPr>
+                        <a:t>Salta 3.5.3.3.1.4.5 → 3.5.3.3.1.6</a:t>
+                      </a:r>
+                      <a:endParaRPr lang="en-US" sz="800" dirty="0">
+                        <a:latin typeface="Arial" charset="0"/>
+                        <a:ea typeface="Arial" charset="0"/>
+                        <a:cs typeface="Arial" charset="0"/>
+                      </a:endParaRPr>
+                    </a:p>
+                  </a:txBody>
+                  <a:tcPr marL="63500" marR="63500" marT="63500" marB="63500" anchor="ctr">
+                    <a:lnL w="6350" cap="flat" cmpd="sng" algn="ctr">
+                      <a:solidFill>
+                        <a:srgbClr val="747975"/>
+                      </a:solidFill>
+                      <a:prstDash val="solid"/>
+                      <a:round/>
+                      <a:headEnd type="none" w="med" len="med"/>
+                      <a:tailEnd type="none" w="med" len="med"/>
+                    </a:lnL>
+                    <a:lnR w="6350" cap="flat" cmpd="sng" algn="ctr">
+                      <a:solidFill>
+                        <a:srgbClr val="747975"/>
+                      </a:solidFill>
+                      <a:prstDash val="solid"/>
+                      <a:round/>
+                      <a:headEnd type="none" w="med" len="med"/>
+                      <a:tailEnd type="none" w="med" len="med"/>
+                    </a:lnR>
+                    <a:lnT w="6350" cap="flat" cmpd="sng" algn="ctr">
+                      <a:solidFill>
+                        <a:srgbClr val="747975"/>
+                      </a:solidFill>
+                      <a:prstDash val="solid"/>
+                      <a:round/>
+                      <a:headEnd type="none" w="med" len="med"/>
+                      <a:tailEnd type="none" w="med" len="med"/>
+                    </a:lnT>
+                    <a:lnB w="6350" cap="flat" cmpd="sng" algn="ctr">
+                      <a:solidFill>
+                        <a:srgbClr val="747975"/>
+                      </a:solidFill>
+                      <a:prstDash val="solid"/>
+                      <a:round/>
+                      <a:headEnd type="none" w="med" len="med"/>
+                      <a:tailEnd type="none" w="med" len="med"/>
+                    </a:lnB>
+                    <a:solidFill>
+                      <a:srgbClr val="FFFFFF"/>
+                    </a:solidFill>
+                  </a:tcPr>
+                </a:tc>
+                <a:tc>
+                  <a:txBody>
+                    <a:bodyPr/>
+                    <a:lstStyle/>
+                    <a:p>
+                      <a:pPr indent="0" marL="0">
+                        <a:buNone/>
+                      </a:pPr>
+                      <a:r>
+                        <a:rPr lang="en-US" sz="800" dirty="0">
+                          <a:solidFill>
+                            <a:srgbClr val="1B1B1E"/>
+                          </a:solidFill>
+                          <a:latin typeface="Arial" pitchFamily="34" charset="0"/>
+                          <a:ea typeface="Arial" pitchFamily="34" charset="-122"/>
+                          <a:cs typeface="Arial" pitchFamily="34" charset="-120"/>
+                        </a:rPr>
+                        <a:t>—</a:t>
+                      </a:r>
+                      <a:endParaRPr lang="en-US" sz="800" dirty="0">
+                        <a:latin typeface="Arial" charset="0"/>
+                        <a:ea typeface="Arial" charset="0"/>
+                        <a:cs typeface="Arial" charset="0"/>
+                      </a:endParaRPr>
+                    </a:p>
+                  </a:txBody>
+                  <a:tcPr marL="63500" marR="63500" marT="63500" marB="63500" anchor="ctr">
+                    <a:lnL w="6350" cap="flat" cmpd="sng" algn="ctr">
+                      <a:solidFill>
+                        <a:srgbClr val="747975"/>
+                      </a:solidFill>
+                      <a:prstDash val="solid"/>
+                      <a:round/>
+                      <a:headEnd type="none" w="med" len="med"/>
+                      <a:tailEnd type="none" w="med" len="med"/>
+                    </a:lnL>
+                    <a:lnR w="6350" cap="flat" cmpd="sng" algn="ctr">
+                      <a:solidFill>
+                        <a:srgbClr val="747975"/>
+                      </a:solidFill>
+                      <a:prstDash val="solid"/>
+                      <a:round/>
+                      <a:headEnd type="none" w="med" len="med"/>
+                      <a:tailEnd type="none" w="med" len="med"/>
+                    </a:lnR>
+                    <a:lnT w="6350" cap="flat" cmpd="sng" algn="ctr">
+                      <a:solidFill>
+                        <a:srgbClr val="747975"/>
+                      </a:solidFill>
+                      <a:prstDash val="solid"/>
+                      <a:round/>
+                      <a:headEnd type="none" w="med" len="med"/>
+                      <a:tailEnd type="none" w="med" len="med"/>
+                    </a:lnT>
+                    <a:lnB w="6350" cap="flat" cmpd="sng" algn="ctr">
+                      <a:solidFill>
+                        <a:srgbClr val="747975"/>
+                      </a:solidFill>
+                      <a:prstDash val="solid"/>
+                      <a:round/>
+                      <a:headEnd type="none" w="med" len="med"/>
+                      <a:tailEnd type="none" w="med" len="med"/>
+                    </a:lnB>
+                    <a:solidFill>
+                      <a:srgbClr val="FFFFFF"/>
+                    </a:solidFill>
+                  </a:tcPr>
+                </a:tc>
+                <a:tc>
+                  <a:txBody>
+                    <a:bodyPr/>
+                    <a:lstStyle/>
+                    <a:p>
+                      <a:pPr indent="0" marL="0">
+                        <a:buNone/>
+                      </a:pPr>
+                      <a:r>
+                        <a:rPr lang="en-US" sz="800" dirty="0">
                           <a:solidFill>
                             <a:srgbClr val="1B1B1E"/>
                           </a:solidFill>
@@ -12222,7 +12454,7 @@
                         </a:rPr>
                         <a:t>Falta un número en la secuencia</a:t>
                       </a:r>
-                      <a:endParaRPr lang="en-US" sz="850" dirty="0">
+                      <a:endParaRPr lang="en-US" sz="800" dirty="0">
                         <a:latin typeface="Arial" charset="0"/>
                         <a:ea typeface="Arial" charset="0"/>
                         <a:cs typeface="Arial" charset="0"/>
@@ -12278,7 +12510,7 @@
       </p:graphicFrame>
       <p:sp>
         <p:nvSpPr>
-          <p:cNvPr id="11" name="Shape 8"/>
+          <p:cNvPr id="10" name="Shape 7"/>
           <p:cNvSpPr/>
           <p:nvPr/>
         </p:nvSpPr>
@@ -12298,7 +12530,7 @@
       </p:sp>
       <p:sp>
         <p:nvSpPr>
-          <p:cNvPr id="12" name="Text 9"/>
+          <p:cNvPr id="11" name="Text 8"/>
           <p:cNvSpPr txBox="1"/>
           <p:nvPr/>
         </p:nvSpPr>
@@ -12329,7 +12561,7 @@
                 <a:ea typeface="Arial" pitchFamily="34" charset="-122"/>
                 <a:cs typeface="Arial" pitchFamily="34" charset="-120"/>
               </a:rPr>
-              <a:t>Programe lo que dice el DOF, pero con las etiquetas en tabla de configuración, no en el código.</a:t>
+              <a:t>Verificadas contra el archivo del propio DOF. Programe lo que dice, con las etiquetas en tabla de configuración.</a:t>
             </a:r>
             <a:endParaRPr lang="en-US" sz="1150" dirty="0"/>
           </a:p>

--- a/s5a/descargables/S5A_ALU_04_Presentacion.pptx
+++ b/s5a/descargables/S5A_ALU_04_Presentacion.pptx
@@ -10453,7 +10453,7 @@
                 <a:ea typeface="Arial" pitchFamily="34" charset="-122"/>
                 <a:cs typeface="Arial" pitchFamily="34" charset="-120"/>
               </a:rPr>
-              <a:t>De la UIF. El Transitorio Sexto le daba cinco días hábiles desde la publicación para instructivos y catálogos: al 1 de octubre de 2026.</a:t>
+              <a:t>De la UIF. El Transitorio Sexto le da cinco días hábiles desde la publicación para instructivos y catálogos: al 1 de octubre de 2026.</a:t>
             </a:r>
             <a:endParaRPr lang="en-US" sz="950" dirty="0"/>
           </a:p>
@@ -28020,7 +28020,7 @@
                           <a:ea typeface="Arial" pitchFamily="34" charset="-122"/>
                           <a:cs typeface="Arial" pitchFamily="34" charset="-120"/>
                         </a:rPr>
-                        <a:t>Vencía el plazo de la UIF para instructivos y catálogos</a:t>
+                        <a:t>Vence el plazo de la UIF para instructivos y catálogos</a:t>
                       </a:r>
                       <a:endParaRPr lang="en-US" sz="1000" dirty="0">
                         <a:latin typeface="Arial" charset="0"/>
